--- a/ev-registry/docs/EV-Pehchaan-deck-syfr-theme.pptx
+++ b/ev-registry/docs/EV-Pehchaan-deck-syfr-theme.pptx
@@ -116,7 +116,7 @@
   <p:extLst>
     <p:ext uri="{521415D9-36F7-43E2-AB2F-B90AF26B5E84}">
       <p14:sectionLst xmlns:p14="http://schemas.microsoft.com/office/powerpoint/2010/main">
-        <p14:section name="Overview" id="{73060ca9-3743-1ceb-aab9-f57b96ed2c37}">
+        <p14:section name="Overview" id="{835a36fd-8a64-762b-3b50-e3ed0681059d}">
           <p14:sldIdLst>
             <p14:sldId id="256"/>
             <p14:sldId id="257"/>
@@ -124,19 +124,19 @@
             <p14:sldId id="259"/>
           </p14:sldIdLst>
         </p14:section>
-        <p14:section name="Company" id="{fc56108e-c7a5-0240-5900-c036ca592e0c}">
+        <p14:section name="Company" id="{c66b7a2a-ddc1-0c18-910d-45a9c23ab21b}">
           <p14:sldIdLst>
             <p14:sldId id="260"/>
             <p14:sldId id="261"/>
           </p14:sldIdLst>
         </p14:section>
-        <p14:section name="Dealer and owner" id="{d547b4ff-cf87-7459-6cbf-7bde0ccdae60}">
+        <p14:section name="Dealer and owner" id="{d92dfe83-6ef5-0f03-74f4-fc0525811a1e}">
           <p14:sldIdLst>
             <p14:sldId id="262"/>
             <p14:sldId id="263"/>
           </p14:sldIdLst>
         </p14:section>
-        <p14:section name="Next" id="{b86e3e0d-bd21-68f0-84c8-0745b7db2353}">
+        <p14:section name="Next" id="{307cb352-4af9-8fd0-39be-24073b683de8}">
           <p14:sldIdLst>
             <p14:sldId id="264"/>
             <p14:sldId id="265"/>
@@ -2146,7 +2146,7 @@
                   <a:schemeClr val="accent2"/>
                 </a:solidFill>
               </a:rPr>
-              <a:t>DEMO WITH SAMPLE DATA</a:t>
+              <a:t>SYFR.LIVE  |  DEMO WITH SAMPLE DATA</a:t>
             </a:r>
             <a:endParaRPr lang="en-US" sz="1100" dirty="0"/>
           </a:p>
@@ -2233,7 +2233,7 @@
       </p:sp>
       <p:pic>
         <p:nvPicPr>
-          <p:cNvPr id="6" name="Plate" descr="Number plate showing the Voltio Motors logo and a QR code">    </p:cNvPr>
+          <p:cNvPr id="6" name="Plate" descr="Number plate showing the syfr.live logo and a QR code">    </p:cNvPr>
           <p:cNvPicPr>
             <a:picLocks noChangeAspect="1"/>
           </p:cNvPicPr>
@@ -2561,7 +2561,7 @@
                   <a:schemeClr val="accent4"/>
                 </a:solidFill>
               </a:rPr>
-              <a:t>All data shown is sample data.</a:t>
+              <a:t>syfr.live  |  All data shown is sample data.</a:t>
             </a:r>
             <a:endParaRPr lang="en-US" sz="1200" dirty="0"/>
           </a:p>
